--- a/slides/decks/s18-myeloma-lymphoma.pptx
+++ b/slides/decks/s18-myeloma-lymphoma.pptx
@@ -134,18 +134,18 @@
   <p:extLst>
     <p:ext uri="{521415D9-36F7-43E2-AB2F-B90AF26B5E84}">
       <p14:sectionLst xmlns:p14="http://schemas.microsoft.com/office/powerpoint/2010/main">
-        <p14:section name="Opening" id="{90135f11-ab43-4a69-d88c-4666028923cd}">
+        <p14:section name="Opening" id="{39221321-f649-02d7-1d63-dce8e6fc2fea}">
           <p14:sldIdLst>
             <p14:sldId id="256"/>
             <p14:sldId id="257"/>
           </p14:sldIdLst>
         </p14:section>
-        <p14:section name="Framework" id="{01bf1c1a-5180-eb37-55f4-a20c785fa246}">
+        <p14:section name="Framework" id="{7fdef64c-f3f1-f1a5-0c9a-2641a9b1944d}">
           <p14:sldIdLst>
             <p14:sldId id="258"/>
           </p14:sldIdLst>
         </p14:section>
-        <p14:section name="Multiple myeloma" id="{c8d764a3-3e8f-c631-d76b-a65a805b0aad}">
+        <p14:section name="Multiple myeloma" id="{8e9a8761-56ab-35bb-444c-cc746d7f42e0}">
           <p14:sldIdLst>
             <p14:sldId id="259"/>
             <p14:sldId id="260"/>
@@ -153,14 +153,14 @@
             <p14:sldId id="262"/>
           </p14:sldIdLst>
         </p14:section>
-        <p14:section name="Large B-cell lymphoma" id="{de472edf-5bd7-dc88-098b-b135281a2863}">
+        <p14:section name="Large B-cell lymphoma" id="{7e5482ea-f436-30e4-cf2b-15b0e59ae01c}">
           <p14:sldIdLst>
             <p14:sldId id="263"/>
             <p14:sldId id="264"/>
             <p14:sldId id="265"/>
           </p14:sldIdLst>
         </p14:section>
-        <p14:section name="Hodgkin, indolent and mantle cell" id="{2f430595-5824-4c9d-a6d8-8e299b124d0b}">
+        <p14:section name="Hodgkin, indolent and mantle cell" id="{53fc0246-7019-599d-6f50-bb80e334160b}">
           <p14:sldIdLst>
             <p14:sldId id="266"/>
             <p14:sldId id="267"/>
@@ -168,12 +168,12 @@
             <p14:sldId id="269"/>
           </p14:sldIdLst>
         </p14:section>
-        <p14:section name="Other diseases" id="{e39ffd4b-1b79-0909-36fd-fdb83a3663bc}">
+        <p14:section name="Other diseases" id="{e081dd87-3194-7e27-babb-f5672b7c7b98}">
           <p14:sldIdLst>
             <p14:sldId id="270"/>
           </p14:sldIdLst>
         </p14:section>
-        <p14:section name="Board questions" id="{fd6c3922-b01d-810d-b1ff-382594e03652}">
+        <p14:section name="Board questions" id="{5396169c-fabf-5f42-b933-79dbcc247e73}">
           <p14:sldIdLst>
             <p14:sldId id="271"/>
             <p14:sldId id="272"/>
@@ -183,14 +183,14 @@
             <p14:sldId id="276"/>
           </p14:sldIdLst>
         </p14:section>
-        <p14:section name="References" id="{516fcf06-4540-bf86-e5c1-f1e0908411a1}">
+        <p14:section name="References" id="{c1c7891e-2f22-933d-80d1-067c6a53b0be}">
           <p14:sldIdLst>
             <p14:sldId id="277"/>
             <p14:sldId id="278"/>
             <p14:sldId id="279"/>
           </p14:sldIdLst>
         </p14:section>
-        <p14:section name="Backup" id="{e39d8852-45f6-7e91-cb92-fb845d38c41c}">
+        <p14:section name="Backup" id="{072fb42c-5565-2a36-4171-fef0e399f379}">
           <p14:sldIdLst>
             <p14:sldId id="280"/>
             <p14:sldId id="281"/>
@@ -9603,7 +9603,7 @@
         </p:nvSpPr>
         <p:spPr>
           <a:xfrm>
-            <a:off x="685800" y="4663440"/>
+            <a:off x="685800" y="4754880"/>
             <a:ext cx="10817352" cy="411480"/>
           </a:xfrm>
           <a:prstGeom prst="rect">
@@ -22839,18 +22839,18 @@
         </p:nvGraphicFramePr>
         <p:xfrm>
           <a:off x="685800" y="2240280"/>
-          <a:ext cx="10817352" cy="914400"/>
+          <a:ext cx="10808208" cy="914400"/>
         </p:xfrm>
         <a:graphic>
           <a:graphicData uri="http://schemas.openxmlformats.org/drawingml/2006/table">
             <a:tbl>
               <a:tblPr/>
               <a:tblGrid>
-                <a:gridCol w="3922776"/>
+                <a:gridCol w="3575304"/>
                 <a:gridCol w="1481328"/>
                 <a:gridCol w="868680"/>
-                <a:gridCol w="2185416"/>
-                <a:gridCol w="2359152"/>
+                <a:gridCol w="2615184"/>
+                <a:gridCol w="2267712"/>
               </a:tblGrid>
               <a:tr h="0">
                 <a:tc>
@@ -22867,7 +22867,7 @@
                             <a:schemeClr val="tx1"/>
                           </a:solidFill>
                         </a:rPr>
-                        <a:t>Product, setting</a:t>
+                        <a:t>Product (trial), n</a:t>
                       </a:r>
                       <a:endParaRPr lang="en-US" sz="1600" dirty="0"/>
                     </a:p>
@@ -23301,7 +23301,7 @@
                             <a:schemeClr val="tx1"/>
                           </a:solidFill>
                         </a:rPr>
-                        <a:t>Ide-cel vs SOC (KarMMa-3), n = 386</a:t>
+                        <a:t>Ide-cel (KarMMa-3), n = 386</a:t>
                       </a:r>
                       <a:endParaRPr lang="en-US" sz="1600" dirty="0"/>
                     </a:p>
@@ -23421,7 +23421,7 @@
                             <a:schemeClr val="tx1"/>
                           </a:solidFill>
                         </a:rPr>
-                        <a:t>13 vs 4 mo</a:t>
+                        <a:t>13 vs 4 mo (SOC)</a:t>
                       </a:r>
                       <a:endParaRPr lang="en-US" sz="1600" dirty="0"/>
                     </a:p>
@@ -23705,7 +23705,7 @@
                             <a:schemeClr val="tx1"/>
                           </a:solidFill>
                         </a:rPr>
-                        <a:t>Cilta-cel vs SOC (CARTITUDE-4), n = 419</a:t>
+                        <a:t>Cilta-cel (CARTITUDE-4), n = 419</a:t>
                       </a:r>
                       <a:endParaRPr lang="en-US" sz="1600" dirty="0"/>
                     </a:p>
@@ -23825,7 +23825,7 @@
                             <a:schemeClr val="tx1"/>
                           </a:solidFill>
                         </a:rPr>
-                        <a:t>Not reached vs 12 mo</a:t>
+                        <a:t>NR vs 12 mo (SOC)</a:t>
                       </a:r>
                       <a:endParaRPr lang="en-US" sz="1600" dirty="0"/>
                     </a:p>

--- a/slides/decks/s18-myeloma-lymphoma.pptx
+++ b/slides/decks/s18-myeloma-lymphoma.pptx
@@ -134,18 +134,18 @@
   <p:extLst>
     <p:ext uri="{521415D9-36F7-43E2-AB2F-B90AF26B5E84}">
       <p14:sectionLst xmlns:p14="http://schemas.microsoft.com/office/powerpoint/2010/main">
-        <p14:section name="Opening" id="{39221321-f649-02d7-1d63-dce8e6fc2fea}">
+        <p14:section name="Opening" id="{c91c880e-9f43-0cf7-6113-f36333f40d21}">
           <p14:sldIdLst>
             <p14:sldId id="256"/>
             <p14:sldId id="257"/>
           </p14:sldIdLst>
         </p14:section>
-        <p14:section name="Framework" id="{7fdef64c-f3f1-f1a5-0c9a-2641a9b1944d}">
+        <p14:section name="Framework" id="{1a5c37e5-85f4-11ef-be79-ba83dc96e349}">
           <p14:sldIdLst>
             <p14:sldId id="258"/>
           </p14:sldIdLst>
         </p14:section>
-        <p14:section name="Multiple myeloma" id="{8e9a8761-56ab-35bb-444c-cc746d7f42e0}">
+        <p14:section name="Multiple myeloma" id="{a567a72e-8a6b-428a-4d18-fc5d3dd8d7bb}">
           <p14:sldIdLst>
             <p14:sldId id="259"/>
             <p14:sldId id="260"/>
@@ -153,14 +153,14 @@
             <p14:sldId id="262"/>
           </p14:sldIdLst>
         </p14:section>
-        <p14:section name="Large B-cell lymphoma" id="{7e5482ea-f436-30e4-cf2b-15b0e59ae01c}">
+        <p14:section name="Large B-cell lymphoma" id="{fdd57a7e-ee64-6e8e-d6e7-04c46f6b030c}">
           <p14:sldIdLst>
             <p14:sldId id="263"/>
             <p14:sldId id="264"/>
             <p14:sldId id="265"/>
           </p14:sldIdLst>
         </p14:section>
-        <p14:section name="Hodgkin, indolent and mantle cell" id="{53fc0246-7019-599d-6f50-bb80e334160b}">
+        <p14:section name="Hodgkin, indolent and mantle cell" id="{a39b7c97-e8d6-0de1-4233-612d15595307}">
           <p14:sldIdLst>
             <p14:sldId id="266"/>
             <p14:sldId id="267"/>
@@ -168,12 +168,12 @@
             <p14:sldId id="269"/>
           </p14:sldIdLst>
         </p14:section>
-        <p14:section name="Other diseases" id="{e081dd87-3194-7e27-babb-f5672b7c7b98}">
+        <p14:section name="Other diseases" id="{ee5e7cc8-df6b-009c-668a-c454e6cb8b98}">
           <p14:sldIdLst>
             <p14:sldId id="270"/>
           </p14:sldIdLst>
         </p14:section>
-        <p14:section name="Board questions" id="{5396169c-fabf-5f42-b933-79dbcc247e73}">
+        <p14:section name="Board questions" id="{cb2d2bc6-b4f8-3237-a011-2b021a0f5cb4}">
           <p14:sldIdLst>
             <p14:sldId id="271"/>
             <p14:sldId id="272"/>
@@ -183,14 +183,14 @@
             <p14:sldId id="276"/>
           </p14:sldIdLst>
         </p14:section>
-        <p14:section name="References" id="{c1c7891e-2f22-933d-80d1-067c6a53b0be}">
+        <p14:section name="References" id="{c2fa021b-97d9-0438-7cdc-9a5d64836020}">
           <p14:sldIdLst>
             <p14:sldId id="277"/>
             <p14:sldId id="278"/>
             <p14:sldId id="279"/>
           </p14:sldIdLst>
         </p14:section>
-        <p14:section name="Backup" id="{072fb42c-5565-2a36-4171-fef0e399f379}">
+        <p14:section name="Backup" id="{ffa7f477-a24a-dee2-4b0c-dae1466cdce6}">
           <p14:sldIdLst>
             <p14:sldId id="280"/>
             <p14:sldId id="281"/>
